--- a/Nairobi_Nexus_Week10_Capstone.pptx
+++ b/Nairobi_Nexus_Week10_Capstone.pptx
@@ -1872,6 +1872,13 @@
             <a:prstDash val="solid"/>
           </a:ln>
         </p:spPr>
+        <p:txBody>
+          <a:bodyPr/>
+          <a:lstStyle/>
+          <a:p>
+            <a:endParaRPr lang="en-US"/>
+          </a:p>
+        </p:txBody>
       </p:sp>
       <p:sp>
         <p:nvSpPr>
@@ -2014,6 +2021,13 @@
             <a:prstDash val="solid"/>
           </a:ln>
         </p:spPr>
+        <p:txBody>
+          <a:bodyPr/>
+          <a:lstStyle/>
+          <a:p>
+            <a:endParaRPr lang="en-US"/>
+          </a:p>
+        </p:txBody>
       </p:sp>
       <p:sp>
         <p:nvSpPr>
@@ -2048,16 +2062,10 @@
                 <a:ea typeface="Calibri" pitchFamily="34" charset="-122"/>
                 <a:cs typeface="Calibri" pitchFamily="34" charset="-120"/>
               </a:rPr>
-              <a:t>Anthony Waliaula</a:t>
-            </a:r>
-            <a:endParaRPr lang="en-US" sz="1300" dirty="0"/>
-          </a:p>
-          <a:p>
-            <a:pPr marL="0" indent="0">
-              <a:buNone/>
-            </a:pPr>
-            <a:r>
-              <a:rPr lang="en-US" sz="1300" b="1" dirty="0">
+              <a:t>Anthony Waliaula-Lead </a:t>
+            </a:r>
+            <a:r>
+              <a:rPr lang="en-US" sz="1300" b="1">
                 <a:solidFill>
                   <a:srgbClr val="FFFFFF"/>
                 </a:solidFill>
@@ -2065,7 +2073,7 @@
                 <a:ea typeface="Calibri" pitchFamily="34" charset="-122"/>
                 <a:cs typeface="Calibri" pitchFamily="34" charset="-120"/>
               </a:rPr>
-              <a:t>Anne Nyambura</a:t>
+              <a:t>Automation Engineer</a:t>
             </a:r>
             <a:endParaRPr lang="en-US" sz="1300" dirty="0"/>
           </a:p>
@@ -2074,15 +2082,61 @@
               <a:buNone/>
             </a:pPr>
             <a:r>
-              <a:rPr lang="en-US" sz="1300" dirty="0">
-                <a:solidFill>
-                  <a:srgbClr val="64748B"/>
+              <a:rPr lang="en-US" sz="1300" b="1" dirty="0">
+                <a:solidFill>
+                  <a:srgbClr val="FFFFFF"/>
                 </a:solidFill>
                 <a:latin typeface="Calibri" pitchFamily="34" charset="0"/>
                 <a:ea typeface="Calibri" pitchFamily="34" charset="-122"/>
                 <a:cs typeface="Calibri" pitchFamily="34" charset="-120"/>
               </a:rPr>
+              <a:t>Anne Nyambura -Documentation &amp; Slides</a:t>
+            </a:r>
+            <a:endParaRPr lang="en-US" sz="1300" dirty="0"/>
+          </a:p>
+          <a:p>
+            <a:r>
+              <a:rPr lang="en-US" sz="1300" dirty="0">
+                <a:solidFill>
+                  <a:srgbClr val="64748B"/>
+                </a:solidFill>
+                <a:latin typeface="Calibri" pitchFamily="34" charset="0"/>
+                <a:ea typeface="Calibri" pitchFamily="34" charset="-122"/>
+                <a:cs typeface="Calibri" pitchFamily="34" charset="-120"/>
+              </a:rPr>
               <a:t>n8n Automation  •  AI Workflow Engineering  •  June 2026</a:t>
+            </a:r>
+            <a:br>
+              <a:rPr lang="en-US" sz="1300" dirty="0">
+                <a:solidFill>
+                  <a:srgbClr val="64748B"/>
+                </a:solidFill>
+                <a:latin typeface="Calibri" pitchFamily="34" charset="0"/>
+                <a:ea typeface="Calibri" pitchFamily="34" charset="-122"/>
+                <a:cs typeface="Calibri" pitchFamily="34" charset="-120"/>
+              </a:rPr>
+            </a:br>
+            <a:r>
+              <a:rPr lang="en-US" sz="1300" dirty="0" err="1">
+                <a:solidFill>
+                  <a:srgbClr val="64748B"/>
+                </a:solidFill>
+                <a:latin typeface="Calibri" pitchFamily="34" charset="0"/>
+                <a:ea typeface="Calibri" pitchFamily="34" charset="-122"/>
+                <a:cs typeface="Calibri" pitchFamily="34" charset="-120"/>
+              </a:rPr>
+              <a:t>Github</a:t>
+            </a:r>
+            <a:r>
+              <a:rPr lang="en-US" sz="1300" dirty="0">
+                <a:solidFill>
+                  <a:srgbClr val="64748B"/>
+                </a:solidFill>
+                <a:latin typeface="Calibri" pitchFamily="34" charset="0"/>
+                <a:ea typeface="Calibri" pitchFamily="34" charset="-122"/>
+                <a:cs typeface="Calibri" pitchFamily="34" charset="-120"/>
+              </a:rPr>
+              <a:t>: https://github.com/awaliaula/moringan8nweek10</a:t>
             </a:r>
             <a:endParaRPr lang="en-US" sz="1300" dirty="0"/>
           </a:p>
@@ -2112,6 +2166,13 @@
             <a:prstDash val="solid"/>
           </a:ln>
         </p:spPr>
+        <p:txBody>
+          <a:bodyPr/>
+          <a:lstStyle/>
+          <a:p>
+            <a:endParaRPr lang="en-US"/>
+          </a:p>
+        </p:txBody>
       </p:sp>
       <p:sp>
         <p:nvSpPr>
@@ -2209,6 +2270,13 @@
             <a:prstDash val="solid"/>
           </a:ln>
         </p:spPr>
+        <p:txBody>
+          <a:bodyPr/>
+          <a:lstStyle/>
+          <a:p>
+            <a:endParaRPr lang="en-US"/>
+          </a:p>
+        </p:txBody>
       </p:sp>
       <p:sp>
         <p:nvSpPr>
@@ -2306,6 +2374,13 @@
             <a:prstDash val="solid"/>
           </a:ln>
         </p:spPr>
+        <p:txBody>
+          <a:bodyPr/>
+          <a:lstStyle/>
+          <a:p>
+            <a:endParaRPr lang="en-US"/>
+          </a:p>
+        </p:txBody>
       </p:sp>
       <p:sp>
         <p:nvSpPr>
@@ -2403,6 +2478,13 @@
             <a:prstDash val="solid"/>
           </a:ln>
         </p:spPr>
+        <p:txBody>
+          <a:bodyPr/>
+          <a:lstStyle/>
+          <a:p>
+            <a:endParaRPr lang="en-US"/>
+          </a:p>
+        </p:txBody>
       </p:sp>
       <p:sp>
         <p:nvSpPr>
@@ -2533,6 +2615,13 @@
             <a:prstDash val="solid"/>
           </a:ln>
         </p:spPr>
+        <p:txBody>
+          <a:bodyPr/>
+          <a:lstStyle/>
+          <a:p>
+            <a:endParaRPr lang="en-US"/>
+          </a:p>
+        </p:txBody>
       </p:sp>
       <p:sp>
         <p:nvSpPr>
@@ -2633,6 +2722,13 @@
             <a:prstDash val="solid"/>
           </a:ln>
         </p:spPr>
+        <p:txBody>
+          <a:bodyPr/>
+          <a:lstStyle/>
+          <a:p>
+            <a:endParaRPr lang="en-US"/>
+          </a:p>
+        </p:txBody>
       </p:sp>
       <p:sp>
         <p:nvSpPr>
@@ -3073,6 +3169,13 @@
             <a:prstDash val="solid"/>
           </a:ln>
         </p:spPr>
+        <p:txBody>
+          <a:bodyPr/>
+          <a:lstStyle/>
+          <a:p>
+            <a:endParaRPr lang="en-US"/>
+          </a:p>
+        </p:txBody>
       </p:sp>
       <p:sp>
         <p:nvSpPr>
@@ -3200,6 +3303,13 @@
             <a:prstDash val="solid"/>
           </a:ln>
         </p:spPr>
+        <p:txBody>
+          <a:bodyPr/>
+          <a:lstStyle/>
+          <a:p>
+            <a:endParaRPr lang="en-US"/>
+          </a:p>
+        </p:txBody>
       </p:sp>
       <p:sp>
         <p:nvSpPr>
@@ -3300,6 +3410,13 @@
             <a:prstDash val="solid"/>
           </a:ln>
         </p:spPr>
+        <p:txBody>
+          <a:bodyPr/>
+          <a:lstStyle/>
+          <a:p>
+            <a:endParaRPr lang="en-US"/>
+          </a:p>
+        </p:txBody>
       </p:sp>
       <p:sp>
         <p:nvSpPr>
@@ -3361,6 +3478,13 @@
             <a:prstDash val="solid"/>
           </a:ln>
         </p:spPr>
+        <p:txBody>
+          <a:bodyPr/>
+          <a:lstStyle/>
+          <a:p>
+            <a:endParaRPr lang="en-US"/>
+          </a:p>
+        </p:txBody>
       </p:sp>
       <p:sp>
         <p:nvSpPr>
@@ -3422,6 +3546,13 @@
             <a:prstDash val="solid"/>
           </a:ln>
         </p:spPr>
+        <p:txBody>
+          <a:bodyPr/>
+          <a:lstStyle/>
+          <a:p>
+            <a:endParaRPr lang="en-US"/>
+          </a:p>
+        </p:txBody>
       </p:sp>
       <p:sp>
         <p:nvSpPr>
@@ -3483,6 +3614,13 @@
             <a:prstDash val="solid"/>
           </a:ln>
         </p:spPr>
+        <p:txBody>
+          <a:bodyPr/>
+          <a:lstStyle/>
+          <a:p>
+            <a:endParaRPr lang="en-US"/>
+          </a:p>
+        </p:txBody>
       </p:sp>
       <p:sp>
         <p:nvSpPr>
@@ -3544,6 +3682,13 @@
             <a:prstDash val="solid"/>
           </a:ln>
         </p:spPr>
+        <p:txBody>
+          <a:bodyPr/>
+          <a:lstStyle/>
+          <a:p>
+            <a:endParaRPr lang="en-US"/>
+          </a:p>
+        </p:txBody>
       </p:sp>
       <p:sp>
         <p:nvSpPr>
@@ -3605,6 +3750,13 @@
             <a:prstDash val="solid"/>
           </a:ln>
         </p:spPr>
+        <p:txBody>
+          <a:bodyPr/>
+          <a:lstStyle/>
+          <a:p>
+            <a:endParaRPr lang="en-US"/>
+          </a:p>
+        </p:txBody>
       </p:sp>
       <p:sp>
         <p:nvSpPr>
@@ -3666,6 +3818,13 @@
             <a:prstDash val="solid"/>
           </a:ln>
         </p:spPr>
+        <p:txBody>
+          <a:bodyPr/>
+          <a:lstStyle/>
+          <a:p>
+            <a:endParaRPr lang="en-US"/>
+          </a:p>
+        </p:txBody>
       </p:sp>
       <p:sp>
         <p:nvSpPr>
@@ -3727,6 +3886,13 @@
             <a:prstDash val="solid"/>
           </a:ln>
         </p:spPr>
+        <p:txBody>
+          <a:bodyPr/>
+          <a:lstStyle/>
+          <a:p>
+            <a:endParaRPr lang="en-US"/>
+          </a:p>
+        </p:txBody>
       </p:sp>
       <p:sp>
         <p:nvSpPr>
@@ -3802,6 +3968,13 @@
             <a:prstDash val="solid"/>
           </a:ln>
         </p:spPr>
+        <p:txBody>
+          <a:bodyPr/>
+          <a:lstStyle/>
+          <a:p>
+            <a:endParaRPr lang="en-US"/>
+          </a:p>
+        </p:txBody>
       </p:sp>
       <p:sp>
         <p:nvSpPr>
@@ -3877,6 +4050,13 @@
             <a:prstDash val="solid"/>
           </a:ln>
         </p:spPr>
+        <p:txBody>
+          <a:bodyPr/>
+          <a:lstStyle/>
+          <a:p>
+            <a:endParaRPr lang="en-US"/>
+          </a:p>
+        </p:txBody>
       </p:sp>
       <p:sp>
         <p:nvSpPr>
@@ -3938,6 +4118,13 @@
             <a:prstDash val="solid"/>
           </a:ln>
         </p:spPr>
+        <p:txBody>
+          <a:bodyPr/>
+          <a:lstStyle/>
+          <a:p>
+            <a:endParaRPr lang="en-US"/>
+          </a:p>
+        </p:txBody>
       </p:sp>
       <p:sp>
         <p:nvSpPr>
@@ -4013,6 +4200,13 @@
             <a:prstDash val="solid"/>
           </a:ln>
         </p:spPr>
+        <p:txBody>
+          <a:bodyPr/>
+          <a:lstStyle/>
+          <a:p>
+            <a:endParaRPr lang="en-US"/>
+          </a:p>
+        </p:txBody>
       </p:sp>
       <p:sp>
         <p:nvSpPr>
@@ -4088,6 +4282,13 @@
             <a:prstDash val="solid"/>
           </a:ln>
         </p:spPr>
+        <p:txBody>
+          <a:bodyPr/>
+          <a:lstStyle/>
+          <a:p>
+            <a:endParaRPr lang="en-US"/>
+          </a:p>
+        </p:txBody>
       </p:sp>
       <p:sp>
         <p:nvSpPr>
@@ -4149,6 +4350,13 @@
             <a:prstDash val="solid"/>
           </a:ln>
         </p:spPr>
+        <p:txBody>
+          <a:bodyPr/>
+          <a:lstStyle/>
+          <a:p>
+            <a:endParaRPr lang="en-US"/>
+          </a:p>
+        </p:txBody>
       </p:sp>
       <p:sp>
         <p:nvSpPr>
@@ -4210,6 +4418,13 @@
             <a:prstDash val="solid"/>
           </a:ln>
         </p:spPr>
+        <p:txBody>
+          <a:bodyPr/>
+          <a:lstStyle/>
+          <a:p>
+            <a:endParaRPr lang="en-US"/>
+          </a:p>
+        </p:txBody>
       </p:sp>
       <p:sp>
         <p:nvSpPr>
@@ -4285,6 +4500,13 @@
             <a:prstDash val="solid"/>
           </a:ln>
         </p:spPr>
+        <p:txBody>
+          <a:bodyPr/>
+          <a:lstStyle/>
+          <a:p>
+            <a:endParaRPr lang="en-US"/>
+          </a:p>
+        </p:txBody>
       </p:sp>
       <p:sp>
         <p:nvSpPr>
@@ -4346,6 +4568,13 @@
             <a:prstDash val="solid"/>
           </a:ln>
         </p:spPr>
+        <p:txBody>
+          <a:bodyPr/>
+          <a:lstStyle/>
+          <a:p>
+            <a:endParaRPr lang="en-US"/>
+          </a:p>
+        </p:txBody>
       </p:sp>
       <p:sp>
         <p:nvSpPr>
@@ -4407,6 +4636,13 @@
             <a:prstDash val="solid"/>
           </a:ln>
         </p:spPr>
+        <p:txBody>
+          <a:bodyPr/>
+          <a:lstStyle/>
+          <a:p>
+            <a:endParaRPr lang="en-US"/>
+          </a:p>
+        </p:txBody>
       </p:sp>
       <p:sp>
         <p:nvSpPr>
@@ -4482,6 +4718,13 @@
             <a:prstDash val="solid"/>
           </a:ln>
         </p:spPr>
+        <p:txBody>
+          <a:bodyPr/>
+          <a:lstStyle/>
+          <a:p>
+            <a:endParaRPr lang="en-US"/>
+          </a:p>
+        </p:txBody>
       </p:sp>
       <p:sp>
         <p:nvSpPr>
@@ -4543,6 +4786,13 @@
             <a:prstDash val="solid"/>
           </a:ln>
         </p:spPr>
+        <p:txBody>
+          <a:bodyPr/>
+          <a:lstStyle/>
+          <a:p>
+            <a:endParaRPr lang="en-US"/>
+          </a:p>
+        </p:txBody>
       </p:sp>
       <p:sp>
         <p:nvSpPr>
@@ -4618,6 +4868,13 @@
             <a:prstDash val="solid"/>
           </a:ln>
         </p:spPr>
+        <p:txBody>
+          <a:bodyPr/>
+          <a:lstStyle/>
+          <a:p>
+            <a:endParaRPr lang="en-US"/>
+          </a:p>
+        </p:txBody>
       </p:sp>
       <p:sp>
         <p:nvSpPr>
@@ -4726,6 +4983,13 @@
             <a:prstDash val="solid"/>
           </a:ln>
         </p:spPr>
+        <p:txBody>
+          <a:bodyPr/>
+          <a:lstStyle/>
+          <a:p>
+            <a:endParaRPr lang="en-US"/>
+          </a:p>
+        </p:txBody>
       </p:sp>
       <p:sp>
         <p:nvSpPr>
@@ -4833,6 +5097,13 @@
             </a:outerShdw>
           </a:effectLst>
         </p:spPr>
+        <p:txBody>
+          <a:bodyPr/>
+          <a:lstStyle/>
+          <a:p>
+            <a:endParaRPr lang="en-US"/>
+          </a:p>
+        </p:txBody>
       </p:sp>
       <p:sp>
         <p:nvSpPr>
@@ -4973,6 +5244,13 @@
             </a:outerShdw>
           </a:effectLst>
         </p:spPr>
+        <p:txBody>
+          <a:bodyPr/>
+          <a:lstStyle/>
+          <a:p>
+            <a:endParaRPr lang="en-US"/>
+          </a:p>
+        </p:txBody>
       </p:sp>
       <p:sp>
         <p:nvSpPr>
@@ -5113,6 +5391,13 @@
             </a:outerShdw>
           </a:effectLst>
         </p:spPr>
+        <p:txBody>
+          <a:bodyPr/>
+          <a:lstStyle/>
+          <a:p>
+            <a:endParaRPr lang="en-US"/>
+          </a:p>
+        </p:txBody>
       </p:sp>
       <p:sp>
         <p:nvSpPr>
@@ -5253,6 +5538,13 @@
             </a:outerShdw>
           </a:effectLst>
         </p:spPr>
+        <p:txBody>
+          <a:bodyPr/>
+          <a:lstStyle/>
+          <a:p>
+            <a:endParaRPr lang="en-US"/>
+          </a:p>
+        </p:txBody>
       </p:sp>
       <p:sp>
         <p:nvSpPr>
@@ -5419,6 +5711,13 @@
             <a:prstDash val="solid"/>
           </a:ln>
         </p:spPr>
+        <p:txBody>
+          <a:bodyPr/>
+          <a:lstStyle/>
+          <a:p>
+            <a:endParaRPr lang="en-US"/>
+          </a:p>
+        </p:txBody>
       </p:sp>
       <p:sp>
         <p:nvSpPr>
@@ -5526,6 +5825,13 @@
             </a:outerShdw>
           </a:effectLst>
         </p:spPr>
+        <p:txBody>
+          <a:bodyPr/>
+          <a:lstStyle/>
+          <a:p>
+            <a:endParaRPr lang="en-US"/>
+          </a:p>
+        </p:txBody>
       </p:sp>
       <p:sp>
         <p:nvSpPr>
@@ -5551,6 +5857,13 @@
             <a:prstDash val="solid"/>
           </a:ln>
         </p:spPr>
+        <p:txBody>
+          <a:bodyPr/>
+          <a:lstStyle/>
+          <a:p>
+            <a:endParaRPr lang="en-US"/>
+          </a:p>
+        </p:txBody>
       </p:sp>
       <p:sp>
         <p:nvSpPr>
@@ -5626,6 +5939,13 @@
             <a:prstDash val="solid"/>
           </a:ln>
         </p:spPr>
+        <p:txBody>
+          <a:bodyPr/>
+          <a:lstStyle/>
+          <a:p>
+            <a:endParaRPr lang="en-US"/>
+          </a:p>
+        </p:txBody>
       </p:sp>
       <p:sp>
         <p:nvSpPr>
@@ -5779,6 +6099,13 @@
             </a:outerShdw>
           </a:effectLst>
         </p:spPr>
+        <p:txBody>
+          <a:bodyPr/>
+          <a:lstStyle/>
+          <a:p>
+            <a:endParaRPr lang="en-US"/>
+          </a:p>
+        </p:txBody>
       </p:sp>
       <p:sp>
         <p:nvSpPr>
@@ -5804,6 +6131,13 @@
             <a:prstDash val="solid"/>
           </a:ln>
         </p:spPr>
+        <p:txBody>
+          <a:bodyPr/>
+          <a:lstStyle/>
+          <a:p>
+            <a:endParaRPr lang="en-US"/>
+          </a:p>
+        </p:txBody>
       </p:sp>
       <p:sp>
         <p:nvSpPr>
@@ -5879,6 +6213,13 @@
             <a:prstDash val="solid"/>
           </a:ln>
         </p:spPr>
+        <p:txBody>
+          <a:bodyPr/>
+          <a:lstStyle/>
+          <a:p>
+            <a:endParaRPr lang="en-US"/>
+          </a:p>
+        </p:txBody>
       </p:sp>
       <p:sp>
         <p:nvSpPr>
@@ -6053,6 +6394,13 @@
             </a:outerShdw>
           </a:effectLst>
         </p:spPr>
+        <p:txBody>
+          <a:bodyPr/>
+          <a:lstStyle/>
+          <a:p>
+            <a:endParaRPr lang="en-US"/>
+          </a:p>
+        </p:txBody>
       </p:sp>
       <p:sp>
         <p:nvSpPr>
@@ -6078,6 +6426,13 @@
             <a:prstDash val="solid"/>
           </a:ln>
         </p:spPr>
+        <p:txBody>
+          <a:bodyPr/>
+          <a:lstStyle/>
+          <a:p>
+            <a:endParaRPr lang="en-US"/>
+          </a:p>
+        </p:txBody>
       </p:sp>
       <p:sp>
         <p:nvSpPr>
@@ -6153,6 +6508,13 @@
             <a:prstDash val="solid"/>
           </a:ln>
         </p:spPr>
+        <p:txBody>
+          <a:bodyPr/>
+          <a:lstStyle/>
+          <a:p>
+            <a:endParaRPr lang="en-US"/>
+          </a:p>
+        </p:txBody>
       </p:sp>
       <p:sp>
         <p:nvSpPr>
@@ -6327,6 +6689,13 @@
             </a:outerShdw>
           </a:effectLst>
         </p:spPr>
+        <p:txBody>
+          <a:bodyPr/>
+          <a:lstStyle/>
+          <a:p>
+            <a:endParaRPr lang="en-US"/>
+          </a:p>
+        </p:txBody>
       </p:sp>
       <p:sp>
         <p:nvSpPr>
@@ -6352,6 +6721,13 @@
             <a:prstDash val="solid"/>
           </a:ln>
         </p:spPr>
+        <p:txBody>
+          <a:bodyPr/>
+          <a:lstStyle/>
+          <a:p>
+            <a:endParaRPr lang="en-US"/>
+          </a:p>
+        </p:txBody>
       </p:sp>
       <p:sp>
         <p:nvSpPr>
@@ -6427,6 +6803,13 @@
             <a:prstDash val="solid"/>
           </a:ln>
         </p:spPr>
+        <p:txBody>
+          <a:bodyPr/>
+          <a:lstStyle/>
+          <a:p>
+            <a:endParaRPr lang="en-US"/>
+          </a:p>
+        </p:txBody>
       </p:sp>
       <p:sp>
         <p:nvSpPr>
@@ -6627,6 +7010,13 @@
             <a:prstDash val="solid"/>
           </a:ln>
         </p:spPr>
+        <p:txBody>
+          <a:bodyPr/>
+          <a:lstStyle/>
+          <a:p>
+            <a:endParaRPr lang="en-US"/>
+          </a:p>
+        </p:txBody>
       </p:sp>
       <p:sp>
         <p:nvSpPr>
@@ -6734,6 +7124,13 @@
             </a:outerShdw>
           </a:effectLst>
         </p:spPr>
+        <p:txBody>
+          <a:bodyPr/>
+          <a:lstStyle/>
+          <a:p>
+            <a:endParaRPr lang="en-US"/>
+          </a:p>
+        </p:txBody>
       </p:sp>
       <p:sp>
         <p:nvSpPr>
@@ -6759,6 +7156,13 @@
             <a:prstDash val="solid"/>
           </a:ln>
         </p:spPr>
+        <p:txBody>
+          <a:bodyPr/>
+          <a:lstStyle/>
+          <a:p>
+            <a:endParaRPr lang="en-US"/>
+          </a:p>
+        </p:txBody>
       </p:sp>
       <p:sp>
         <p:nvSpPr>
@@ -7032,6 +7436,13 @@
             </a:outerShdw>
           </a:effectLst>
         </p:spPr>
+        <p:txBody>
+          <a:bodyPr/>
+          <a:lstStyle/>
+          <a:p>
+            <a:endParaRPr lang="en-US"/>
+          </a:p>
+        </p:txBody>
       </p:sp>
       <p:sp>
         <p:nvSpPr>
@@ -7057,6 +7468,13 @@
             <a:prstDash val="solid"/>
           </a:ln>
         </p:spPr>
+        <p:txBody>
+          <a:bodyPr/>
+          <a:lstStyle/>
+          <a:p>
+            <a:endParaRPr lang="en-US"/>
+          </a:p>
+        </p:txBody>
       </p:sp>
       <p:sp>
         <p:nvSpPr>
@@ -7392,6 +7810,13 @@
             <a:prstDash val="solid"/>
           </a:ln>
         </p:spPr>
+        <p:txBody>
+          <a:bodyPr/>
+          <a:lstStyle/>
+          <a:p>
+            <a:endParaRPr lang="en-US"/>
+          </a:p>
+        </p:txBody>
       </p:sp>
       <p:sp>
         <p:nvSpPr>
@@ -7534,6 +7959,13 @@
             <a:prstDash val="solid"/>
           </a:ln>
         </p:spPr>
+        <p:txBody>
+          <a:bodyPr/>
+          <a:lstStyle/>
+          <a:p>
+            <a:endParaRPr lang="en-US"/>
+          </a:p>
+        </p:txBody>
       </p:sp>
       <p:sp>
         <p:nvSpPr>
@@ -8025,6 +8457,13 @@
             <a:prstDash val="solid"/>
           </a:ln>
         </p:spPr>
+        <p:txBody>
+          <a:bodyPr/>
+          <a:lstStyle/>
+          <a:p>
+            <a:endParaRPr lang="en-US"/>
+          </a:p>
+        </p:txBody>
       </p:sp>
       <p:sp>
         <p:nvSpPr>
@@ -8132,6 +8571,13 @@
             </a:outerShdw>
           </a:effectLst>
         </p:spPr>
+        <p:txBody>
+          <a:bodyPr/>
+          <a:lstStyle/>
+          <a:p>
+            <a:endParaRPr lang="en-US"/>
+          </a:p>
+        </p:txBody>
       </p:sp>
       <p:sp>
         <p:nvSpPr>
@@ -8157,6 +8603,13 @@
             <a:prstDash val="solid"/>
           </a:ln>
         </p:spPr>
+        <p:txBody>
+          <a:bodyPr/>
+          <a:lstStyle/>
+          <a:p>
+            <a:endParaRPr lang="en-US"/>
+          </a:p>
+        </p:txBody>
       </p:sp>
       <p:sp>
         <p:nvSpPr>
@@ -8297,6 +8750,13 @@
             </a:outerShdw>
           </a:effectLst>
         </p:spPr>
+        <p:txBody>
+          <a:bodyPr/>
+          <a:lstStyle/>
+          <a:p>
+            <a:endParaRPr lang="en-US"/>
+          </a:p>
+        </p:txBody>
       </p:sp>
       <p:sp>
         <p:nvSpPr>
@@ -8322,6 +8782,13 @@
             <a:prstDash val="solid"/>
           </a:ln>
         </p:spPr>
+        <p:txBody>
+          <a:bodyPr/>
+          <a:lstStyle/>
+          <a:p>
+            <a:endParaRPr lang="en-US"/>
+          </a:p>
+        </p:txBody>
       </p:sp>
       <p:sp>
         <p:nvSpPr>
@@ -8462,6 +8929,13 @@
             </a:outerShdw>
           </a:effectLst>
         </p:spPr>
+        <p:txBody>
+          <a:bodyPr/>
+          <a:lstStyle/>
+          <a:p>
+            <a:endParaRPr lang="en-US"/>
+          </a:p>
+        </p:txBody>
       </p:sp>
       <p:sp>
         <p:nvSpPr>
@@ -8487,6 +8961,13 @@
             <a:prstDash val="solid"/>
           </a:ln>
         </p:spPr>
+        <p:txBody>
+          <a:bodyPr/>
+          <a:lstStyle/>
+          <a:p>
+            <a:endParaRPr lang="en-US"/>
+          </a:p>
+        </p:txBody>
       </p:sp>
       <p:sp>
         <p:nvSpPr>
@@ -8627,6 +9108,13 @@
             </a:outerShdw>
           </a:effectLst>
         </p:spPr>
+        <p:txBody>
+          <a:bodyPr/>
+          <a:lstStyle/>
+          <a:p>
+            <a:endParaRPr lang="en-US"/>
+          </a:p>
+        </p:txBody>
       </p:sp>
       <p:sp>
         <p:nvSpPr>
@@ -8652,6 +9140,13 @@
             <a:prstDash val="solid"/>
           </a:ln>
         </p:spPr>
+        <p:txBody>
+          <a:bodyPr/>
+          <a:lstStyle/>
+          <a:p>
+            <a:endParaRPr lang="en-US"/>
+          </a:p>
+        </p:txBody>
       </p:sp>
       <p:sp>
         <p:nvSpPr>
@@ -8792,6 +9287,13 @@
             </a:outerShdw>
           </a:effectLst>
         </p:spPr>
+        <p:txBody>
+          <a:bodyPr/>
+          <a:lstStyle/>
+          <a:p>
+            <a:endParaRPr lang="en-US"/>
+          </a:p>
+        </p:txBody>
       </p:sp>
       <p:sp>
         <p:nvSpPr>
@@ -8817,6 +9319,13 @@
             <a:prstDash val="solid"/>
           </a:ln>
         </p:spPr>
+        <p:txBody>
+          <a:bodyPr/>
+          <a:lstStyle/>
+          <a:p>
+            <a:endParaRPr lang="en-US"/>
+          </a:p>
+        </p:txBody>
       </p:sp>
       <p:sp>
         <p:nvSpPr>
@@ -8957,6 +9466,13 @@
             </a:outerShdw>
           </a:effectLst>
         </p:spPr>
+        <p:txBody>
+          <a:bodyPr/>
+          <a:lstStyle/>
+          <a:p>
+            <a:endParaRPr lang="en-US"/>
+          </a:p>
+        </p:txBody>
       </p:sp>
       <p:sp>
         <p:nvSpPr>
@@ -8982,6 +9498,13 @@
             <a:prstDash val="solid"/>
           </a:ln>
         </p:spPr>
+        <p:txBody>
+          <a:bodyPr/>
+          <a:lstStyle/>
+          <a:p>
+            <a:endParaRPr lang="en-US"/>
+          </a:p>
+        </p:txBody>
       </p:sp>
       <p:sp>
         <p:nvSpPr>
@@ -9122,6 +9645,13 @@
             </a:outerShdw>
           </a:effectLst>
         </p:spPr>
+        <p:txBody>
+          <a:bodyPr/>
+          <a:lstStyle/>
+          <a:p>
+            <a:endParaRPr lang="en-US"/>
+          </a:p>
+        </p:txBody>
       </p:sp>
       <p:sp>
         <p:nvSpPr>
@@ -9147,6 +9677,13 @@
             <a:prstDash val="solid"/>
           </a:ln>
         </p:spPr>
+        <p:txBody>
+          <a:bodyPr/>
+          <a:lstStyle/>
+          <a:p>
+            <a:endParaRPr lang="en-US"/>
+          </a:p>
+        </p:txBody>
       </p:sp>
       <p:sp>
         <p:nvSpPr>
@@ -9313,6 +9850,13 @@
             <a:prstDash val="solid"/>
           </a:ln>
         </p:spPr>
+        <p:txBody>
+          <a:bodyPr/>
+          <a:lstStyle/>
+          <a:p>
+            <a:endParaRPr lang="en-US"/>
+          </a:p>
+        </p:txBody>
       </p:sp>
       <p:sp>
         <p:nvSpPr>
@@ -9456,6 +10000,13 @@
             </a:outerShdw>
           </a:effectLst>
         </p:spPr>
+        <p:txBody>
+          <a:bodyPr/>
+          <a:lstStyle/>
+          <a:p>
+            <a:endParaRPr lang="en-US"/>
+          </a:p>
+        </p:txBody>
       </p:sp>
       <p:sp>
         <p:nvSpPr>
@@ -9481,6 +10032,13 @@
             <a:prstDash val="solid"/>
           </a:ln>
         </p:spPr>
+        <p:txBody>
+          <a:bodyPr/>
+          <a:lstStyle/>
+          <a:p>
+            <a:endParaRPr lang="en-US"/>
+          </a:p>
+        </p:txBody>
       </p:sp>
       <p:sp>
         <p:nvSpPr>
@@ -9644,6 +10202,13 @@
             </a:outerShdw>
           </a:effectLst>
         </p:spPr>
+        <p:txBody>
+          <a:bodyPr/>
+          <a:lstStyle/>
+          <a:p>
+            <a:endParaRPr lang="en-US"/>
+          </a:p>
+        </p:txBody>
       </p:sp>
       <p:sp>
         <p:nvSpPr>
@@ -9669,6 +10234,13 @@
             <a:prstDash val="solid"/>
           </a:ln>
         </p:spPr>
+        <p:txBody>
+          <a:bodyPr/>
+          <a:lstStyle/>
+          <a:p>
+            <a:endParaRPr lang="en-US"/>
+          </a:p>
+        </p:txBody>
       </p:sp>
       <p:sp>
         <p:nvSpPr>
@@ -9832,6 +10404,13 @@
             </a:outerShdw>
           </a:effectLst>
         </p:spPr>
+        <p:txBody>
+          <a:bodyPr/>
+          <a:lstStyle/>
+          <a:p>
+            <a:endParaRPr lang="en-US"/>
+          </a:p>
+        </p:txBody>
       </p:sp>
       <p:sp>
         <p:nvSpPr>
@@ -9857,6 +10436,13 @@
             <a:prstDash val="solid"/>
           </a:ln>
         </p:spPr>
+        <p:txBody>
+          <a:bodyPr/>
+          <a:lstStyle/>
+          <a:p>
+            <a:endParaRPr lang="en-US"/>
+          </a:p>
+        </p:txBody>
       </p:sp>
       <p:sp>
         <p:nvSpPr>
@@ -10020,6 +10606,13 @@
             </a:outerShdw>
           </a:effectLst>
         </p:spPr>
+        <p:txBody>
+          <a:bodyPr/>
+          <a:lstStyle/>
+          <a:p>
+            <a:endParaRPr lang="en-US"/>
+          </a:p>
+        </p:txBody>
       </p:sp>
       <p:sp>
         <p:nvSpPr>
@@ -10045,6 +10638,13 @@
             <a:prstDash val="solid"/>
           </a:ln>
         </p:spPr>
+        <p:txBody>
+          <a:bodyPr/>
+          <a:lstStyle/>
+          <a:p>
+            <a:endParaRPr lang="en-US"/>
+          </a:p>
+        </p:txBody>
       </p:sp>
       <p:sp>
         <p:nvSpPr>
@@ -10208,6 +10808,13 @@
             </a:outerShdw>
           </a:effectLst>
         </p:spPr>
+        <p:txBody>
+          <a:bodyPr/>
+          <a:lstStyle/>
+          <a:p>
+            <a:endParaRPr lang="en-US"/>
+          </a:p>
+        </p:txBody>
       </p:sp>
       <p:sp>
         <p:nvSpPr>
@@ -10233,6 +10840,13 @@
             <a:prstDash val="solid"/>
           </a:ln>
         </p:spPr>
+        <p:txBody>
+          <a:bodyPr/>
+          <a:lstStyle/>
+          <a:p>
+            <a:endParaRPr lang="en-US"/>
+          </a:p>
+        </p:txBody>
       </p:sp>
       <p:sp>
         <p:nvSpPr>
@@ -10396,6 +11010,13 @@
             </a:outerShdw>
           </a:effectLst>
         </p:spPr>
+        <p:txBody>
+          <a:bodyPr/>
+          <a:lstStyle/>
+          <a:p>
+            <a:endParaRPr lang="en-US"/>
+          </a:p>
+        </p:txBody>
       </p:sp>
       <p:sp>
         <p:nvSpPr>
@@ -10421,6 +11042,13 @@
             <a:prstDash val="solid"/>
           </a:ln>
         </p:spPr>
+        <p:txBody>
+          <a:bodyPr/>
+          <a:lstStyle/>
+          <a:p>
+            <a:endParaRPr lang="en-US"/>
+          </a:p>
+        </p:txBody>
       </p:sp>
       <p:sp>
         <p:nvSpPr>
@@ -10646,6 +11274,13 @@
             <a:prstDash val="solid"/>
           </a:ln>
         </p:spPr>
+        <p:txBody>
+          <a:bodyPr/>
+          <a:lstStyle/>
+          <a:p>
+            <a:endParaRPr lang="en-US"/>
+          </a:p>
+        </p:txBody>
       </p:sp>
       <p:sp>
         <p:nvSpPr>
@@ -10746,6 +11381,13 @@
             <a:prstDash val="solid"/>
           </a:ln>
         </p:spPr>
+        <p:txBody>
+          <a:bodyPr/>
+          <a:lstStyle/>
+          <a:p>
+            <a:endParaRPr lang="en-US"/>
+          </a:p>
+        </p:txBody>
       </p:sp>
       <p:sp>
         <p:nvSpPr>
@@ -10805,6 +11447,13 @@
             <a:prstDash val="solid"/>
           </a:ln>
         </p:spPr>
+        <p:txBody>
+          <a:bodyPr/>
+          <a:lstStyle/>
+          <a:p>
+            <a:endParaRPr lang="en-US"/>
+          </a:p>
+        </p:txBody>
       </p:sp>
       <p:sp>
         <p:nvSpPr>
@@ -10830,6 +11479,13 @@
             <a:prstDash val="solid"/>
           </a:ln>
         </p:spPr>
+        <p:txBody>
+          <a:bodyPr/>
+          <a:lstStyle/>
+          <a:p>
+            <a:endParaRPr lang="en-US"/>
+          </a:p>
+        </p:txBody>
       </p:sp>
       <p:sp>
         <p:nvSpPr>
@@ -10903,6 +11559,13 @@
             <a:prstDash val="solid"/>
           </a:ln>
         </p:spPr>
+        <p:txBody>
+          <a:bodyPr/>
+          <a:lstStyle/>
+          <a:p>
+            <a:endParaRPr lang="en-US"/>
+          </a:p>
+        </p:txBody>
       </p:sp>
       <p:sp>
         <p:nvSpPr>
@@ -10928,6 +11591,13 @@
             <a:prstDash val="solid"/>
           </a:ln>
         </p:spPr>
+        <p:txBody>
+          <a:bodyPr/>
+          <a:lstStyle/>
+          <a:p>
+            <a:endParaRPr lang="en-US"/>
+          </a:p>
+        </p:txBody>
       </p:sp>
       <p:sp>
         <p:nvSpPr>
@@ -11003,6 +11673,13 @@
             <a:prstDash val="solid"/>
           </a:ln>
         </p:spPr>
+        <p:txBody>
+          <a:bodyPr/>
+          <a:lstStyle/>
+          <a:p>
+            <a:endParaRPr lang="en-US"/>
+          </a:p>
+        </p:txBody>
       </p:sp>
       <p:sp>
         <p:nvSpPr>
@@ -11090,6 +11767,13 @@
             <a:prstDash val="solid"/>
           </a:ln>
         </p:spPr>
+        <p:txBody>
+          <a:bodyPr/>
+          <a:lstStyle/>
+          <a:p>
+            <a:endParaRPr lang="en-US"/>
+          </a:p>
+        </p:txBody>
       </p:sp>
       <p:sp>
         <p:nvSpPr>
@@ -11115,6 +11799,13 @@
             <a:prstDash val="solid"/>
           </a:ln>
         </p:spPr>
+        <p:txBody>
+          <a:bodyPr/>
+          <a:lstStyle/>
+          <a:p>
+            <a:endParaRPr lang="en-US"/>
+          </a:p>
+        </p:txBody>
       </p:sp>
       <p:sp>
         <p:nvSpPr>
@@ -11204,6 +11895,13 @@
             <a:prstDash val="solid"/>
           </a:ln>
         </p:spPr>
+        <p:txBody>
+          <a:bodyPr/>
+          <a:lstStyle/>
+          <a:p>
+            <a:endParaRPr lang="en-US"/>
+          </a:p>
+        </p:txBody>
       </p:sp>
       <p:sp>
         <p:nvSpPr>
@@ -11277,6 +11975,13 @@
             <a:prstDash val="solid"/>
           </a:ln>
         </p:spPr>
+        <p:txBody>
+          <a:bodyPr/>
+          <a:lstStyle/>
+          <a:p>
+            <a:endParaRPr lang="en-US"/>
+          </a:p>
+        </p:txBody>
       </p:sp>
       <p:sp>
         <p:nvSpPr>
@@ -11302,6 +12007,13 @@
             <a:prstDash val="solid"/>
           </a:ln>
         </p:spPr>
+        <p:txBody>
+          <a:bodyPr/>
+          <a:lstStyle/>
+          <a:p>
+            <a:endParaRPr lang="en-US"/>
+          </a:p>
+        </p:txBody>
       </p:sp>
       <p:sp>
         <p:nvSpPr>
@@ -11377,6 +12089,13 @@
             <a:prstDash val="solid"/>
           </a:ln>
         </p:spPr>
+        <p:txBody>
+          <a:bodyPr/>
+          <a:lstStyle/>
+          <a:p>
+            <a:endParaRPr lang="en-US"/>
+          </a:p>
+        </p:txBody>
       </p:sp>
       <p:sp>
         <p:nvSpPr>
@@ -11464,6 +12183,13 @@
             <a:prstDash val="solid"/>
           </a:ln>
         </p:spPr>
+        <p:txBody>
+          <a:bodyPr/>
+          <a:lstStyle/>
+          <a:p>
+            <a:endParaRPr lang="en-US"/>
+          </a:p>
+        </p:txBody>
       </p:sp>
       <p:sp>
         <p:nvSpPr>
@@ -11489,6 +12215,13 @@
             <a:prstDash val="solid"/>
           </a:ln>
         </p:spPr>
+        <p:txBody>
+          <a:bodyPr/>
+          <a:lstStyle/>
+          <a:p>
+            <a:endParaRPr lang="en-US"/>
+          </a:p>
+        </p:txBody>
       </p:sp>
       <p:sp>
         <p:nvSpPr>
@@ -11578,6 +12311,13 @@
             <a:prstDash val="solid"/>
           </a:ln>
         </p:spPr>
+        <p:txBody>
+          <a:bodyPr/>
+          <a:lstStyle/>
+          <a:p>
+            <a:endParaRPr lang="en-US"/>
+          </a:p>
+        </p:txBody>
       </p:sp>
       <p:sp>
         <p:nvSpPr>
@@ -11665,6 +12405,13 @@
             <a:prstDash val="solid"/>
           </a:ln>
         </p:spPr>
+        <p:txBody>
+          <a:bodyPr/>
+          <a:lstStyle/>
+          <a:p>
+            <a:endParaRPr lang="en-US"/>
+          </a:p>
+        </p:txBody>
       </p:sp>
       <p:sp>
         <p:nvSpPr>
@@ -11690,6 +12437,13 @@
             <a:prstDash val="solid"/>
           </a:ln>
         </p:spPr>
+        <p:txBody>
+          <a:bodyPr/>
+          <a:lstStyle/>
+          <a:p>
+            <a:endParaRPr lang="en-US"/>
+          </a:p>
+        </p:txBody>
       </p:sp>
       <p:sp>
         <p:nvSpPr>
@@ -11777,6 +12531,13 @@
             <a:prstDash val="solid"/>
           </a:ln>
         </p:spPr>
+        <p:txBody>
+          <a:bodyPr/>
+          <a:lstStyle/>
+          <a:p>
+            <a:endParaRPr lang="en-US"/>
+          </a:p>
+        </p:txBody>
       </p:sp>
       <p:sp>
         <p:nvSpPr>
@@ -11800,6 +12561,13 @@
             <a:prstDash val="solid"/>
           </a:ln>
         </p:spPr>
+        <p:txBody>
+          <a:bodyPr/>
+          <a:lstStyle/>
+          <a:p>
+            <a:endParaRPr lang="en-US"/>
+          </a:p>
+        </p:txBody>
       </p:sp>
       <p:sp>
         <p:nvSpPr>
@@ -11823,6 +12591,13 @@
             <a:prstDash val="solid"/>
           </a:ln>
         </p:spPr>
+        <p:txBody>
+          <a:bodyPr/>
+          <a:lstStyle/>
+          <a:p>
+            <a:endParaRPr lang="en-US"/>
+          </a:p>
+        </p:txBody>
       </p:sp>
       <p:sp>
         <p:nvSpPr>
@@ -11846,6 +12621,13 @@
             <a:prstDash val="solid"/>
           </a:ln>
         </p:spPr>
+        <p:txBody>
+          <a:bodyPr/>
+          <a:lstStyle/>
+          <a:p>
+            <a:endParaRPr lang="en-US"/>
+          </a:p>
+        </p:txBody>
       </p:sp>
       <p:sp>
         <p:nvSpPr>
@@ -11869,6 +12651,13 @@
             <a:prstDash val="solid"/>
           </a:ln>
         </p:spPr>
+        <p:txBody>
+          <a:bodyPr/>
+          <a:lstStyle/>
+          <a:p>
+            <a:endParaRPr lang="en-US"/>
+          </a:p>
+        </p:txBody>
       </p:sp>
       <p:sp>
         <p:nvSpPr>
@@ -11894,6 +12683,13 @@
             <a:prstDash val="solid"/>
           </a:ln>
         </p:spPr>
+        <p:txBody>
+          <a:bodyPr/>
+          <a:lstStyle/>
+          <a:p>
+            <a:endParaRPr lang="en-US"/>
+          </a:p>
+        </p:txBody>
       </p:sp>
       <p:sp>
         <p:nvSpPr>
@@ -11953,6 +12749,13 @@
             <a:prstDash val="solid"/>
           </a:ln>
         </p:spPr>
+        <p:txBody>
+          <a:bodyPr/>
+          <a:lstStyle/>
+          <a:p>
+            <a:endParaRPr lang="en-US"/>
+          </a:p>
+        </p:txBody>
       </p:sp>
       <p:sp>
         <p:nvSpPr>
@@ -11978,6 +12781,13 @@
             <a:prstDash val="solid"/>
           </a:ln>
         </p:spPr>
+        <p:txBody>
+          <a:bodyPr/>
+          <a:lstStyle/>
+          <a:p>
+            <a:endParaRPr lang="en-US"/>
+          </a:p>
+        </p:txBody>
       </p:sp>
       <p:sp>
         <p:nvSpPr>
@@ -12051,6 +12861,13 @@
             <a:prstDash val="solid"/>
           </a:ln>
         </p:spPr>
+        <p:txBody>
+          <a:bodyPr/>
+          <a:lstStyle/>
+          <a:p>
+            <a:endParaRPr lang="en-US"/>
+          </a:p>
+        </p:txBody>
       </p:sp>
       <p:sp>
         <p:nvSpPr>
@@ -12074,6 +12891,13 @@
             <a:prstDash val="solid"/>
           </a:ln>
         </p:spPr>
+        <p:txBody>
+          <a:bodyPr/>
+          <a:lstStyle/>
+          <a:p>
+            <a:endParaRPr lang="en-US"/>
+          </a:p>
+        </p:txBody>
       </p:sp>
       <p:sp>
         <p:nvSpPr>
@@ -12099,6 +12923,13 @@
             <a:prstDash val="solid"/>
           </a:ln>
         </p:spPr>
+        <p:txBody>
+          <a:bodyPr/>
+          <a:lstStyle/>
+          <a:p>
+            <a:endParaRPr lang="en-US"/>
+          </a:p>
+        </p:txBody>
       </p:sp>
       <p:sp>
         <p:nvSpPr>
@@ -12174,6 +13005,13 @@
             <a:prstDash val="solid"/>
           </a:ln>
         </p:spPr>
+        <p:txBody>
+          <a:bodyPr/>
+          <a:lstStyle/>
+          <a:p>
+            <a:endParaRPr lang="en-US"/>
+          </a:p>
+        </p:txBody>
       </p:sp>
       <p:sp>
         <p:nvSpPr>
@@ -12318,6 +13156,13 @@
             <a:prstDash val="solid"/>
           </a:ln>
         </p:spPr>
+        <p:txBody>
+          <a:bodyPr/>
+          <a:lstStyle/>
+          <a:p>
+            <a:endParaRPr lang="en-US"/>
+          </a:p>
+        </p:txBody>
       </p:sp>
       <p:sp>
         <p:nvSpPr>
@@ -12425,6 +13270,13 @@
             </a:outerShdw>
           </a:effectLst>
         </p:spPr>
+        <p:txBody>
+          <a:bodyPr/>
+          <a:lstStyle/>
+          <a:p>
+            <a:endParaRPr lang="en-US"/>
+          </a:p>
+        </p:txBody>
       </p:sp>
       <p:sp>
         <p:nvSpPr>
@@ -12450,6 +13302,13 @@
             <a:prstDash val="solid"/>
           </a:ln>
         </p:spPr>
+        <p:txBody>
+          <a:bodyPr/>
+          <a:lstStyle/>
+          <a:p>
+            <a:endParaRPr lang="en-US"/>
+          </a:p>
+        </p:txBody>
       </p:sp>
       <p:sp>
         <p:nvSpPr>
@@ -12666,6 +13525,13 @@
             </a:outerShdw>
           </a:effectLst>
         </p:spPr>
+        <p:txBody>
+          <a:bodyPr/>
+          <a:lstStyle/>
+          <a:p>
+            <a:endParaRPr lang="en-US"/>
+          </a:p>
+        </p:txBody>
       </p:sp>
       <p:sp>
         <p:nvSpPr>
@@ -12691,6 +13557,13 @@
             <a:prstDash val="solid"/>
           </a:ln>
         </p:spPr>
+        <p:txBody>
+          <a:bodyPr/>
+          <a:lstStyle/>
+          <a:p>
+            <a:endParaRPr lang="en-US"/>
+          </a:p>
+        </p:txBody>
       </p:sp>
       <p:sp>
         <p:nvSpPr>
@@ -12933,6 +13806,13 @@
             <a:prstDash val="solid"/>
           </a:ln>
         </p:spPr>
+        <p:txBody>
+          <a:bodyPr/>
+          <a:lstStyle/>
+          <a:p>
+            <a:endParaRPr lang="en-US"/>
+          </a:p>
+        </p:txBody>
       </p:sp>
       <p:sp>
         <p:nvSpPr>
@@ -13069,6 +13949,13 @@
             <a:prstDash val="solid"/>
           </a:ln>
         </p:spPr>
+        <p:txBody>
+          <a:bodyPr/>
+          <a:lstStyle/>
+          <a:p>
+            <a:endParaRPr lang="en-US"/>
+          </a:p>
+        </p:txBody>
       </p:sp>
       <p:sp>
         <p:nvSpPr>
@@ -13458,6 +14345,13 @@
             <a:prstDash val="solid"/>
           </a:ln>
         </p:spPr>
+        <p:txBody>
+          <a:bodyPr/>
+          <a:lstStyle/>
+          <a:p>
+            <a:endParaRPr lang="en-US"/>
+          </a:p>
+        </p:txBody>
       </p:sp>
       <p:sp>
         <p:nvSpPr>
@@ -14018,6 +14912,13 @@
             <a:prstDash val="solid"/>
           </a:ln>
         </p:spPr>
+        <p:txBody>
+          <a:bodyPr/>
+          <a:lstStyle/>
+          <a:p>
+            <a:endParaRPr lang="en-US"/>
+          </a:p>
+        </p:txBody>
       </p:sp>
       <p:sp>
         <p:nvSpPr>
@@ -14161,6 +15062,13 @@
             </a:outerShdw>
           </a:effectLst>
         </p:spPr>
+        <p:txBody>
+          <a:bodyPr/>
+          <a:lstStyle/>
+          <a:p>
+            <a:endParaRPr lang="en-US"/>
+          </a:p>
+        </p:txBody>
       </p:sp>
       <p:sp>
         <p:nvSpPr>
@@ -14186,6 +15094,13 @@
             <a:prstDash val="solid"/>
           </a:ln>
         </p:spPr>
+        <p:txBody>
+          <a:bodyPr/>
+          <a:lstStyle/>
+          <a:p>
+            <a:endParaRPr lang="en-US"/>
+          </a:p>
+        </p:txBody>
       </p:sp>
       <p:sp>
         <p:nvSpPr>
@@ -14381,6 +15296,13 @@
             </a:outerShdw>
           </a:effectLst>
         </p:spPr>
+        <p:txBody>
+          <a:bodyPr/>
+          <a:lstStyle/>
+          <a:p>
+            <a:endParaRPr lang="en-US"/>
+          </a:p>
+        </p:txBody>
       </p:sp>
       <p:sp>
         <p:nvSpPr>
@@ -14406,6 +15328,13 @@
             <a:prstDash val="solid"/>
           </a:ln>
         </p:spPr>
+        <p:txBody>
+          <a:bodyPr/>
+          <a:lstStyle/>
+          <a:p>
+            <a:endParaRPr lang="en-US"/>
+          </a:p>
+        </p:txBody>
       </p:sp>
       <p:sp>
         <p:nvSpPr>
@@ -14601,6 +15530,13 @@
             </a:outerShdw>
           </a:effectLst>
         </p:spPr>
+        <p:txBody>
+          <a:bodyPr/>
+          <a:lstStyle/>
+          <a:p>
+            <a:endParaRPr lang="en-US"/>
+          </a:p>
+        </p:txBody>
       </p:sp>
       <p:sp>
         <p:nvSpPr>
@@ -14626,6 +15562,13 @@
             <a:prstDash val="solid"/>
           </a:ln>
         </p:spPr>
+        <p:txBody>
+          <a:bodyPr/>
+          <a:lstStyle/>
+          <a:p>
+            <a:endParaRPr lang="en-US"/>
+          </a:p>
+        </p:txBody>
       </p:sp>
       <p:sp>
         <p:nvSpPr>
@@ -14847,6 +15790,13 @@
             <a:prstDash val="solid"/>
           </a:ln>
         </p:spPr>
+        <p:txBody>
+          <a:bodyPr/>
+          <a:lstStyle/>
+          <a:p>
+            <a:endParaRPr lang="en-US"/>
+          </a:p>
+        </p:txBody>
       </p:sp>
       <p:sp>
         <p:nvSpPr>
@@ -14947,6 +15897,13 @@
             <a:prstDash val="solid"/>
           </a:ln>
         </p:spPr>
+        <p:txBody>
+          <a:bodyPr/>
+          <a:lstStyle/>
+          <a:p>
+            <a:endParaRPr lang="en-US"/>
+          </a:p>
+        </p:txBody>
       </p:sp>
       <p:sp>
         <p:nvSpPr>
@@ -15008,6 +15965,13 @@
             <a:prstDash val="solid"/>
           </a:ln>
         </p:spPr>
+        <p:txBody>
+          <a:bodyPr/>
+          <a:lstStyle/>
+          <a:p>
+            <a:endParaRPr lang="en-US"/>
+          </a:p>
+        </p:txBody>
       </p:sp>
       <p:sp>
         <p:nvSpPr>
@@ -15069,6 +16033,13 @@
             <a:prstDash val="solid"/>
           </a:ln>
         </p:spPr>
+        <p:txBody>
+          <a:bodyPr/>
+          <a:lstStyle/>
+          <a:p>
+            <a:endParaRPr lang="en-US"/>
+          </a:p>
+        </p:txBody>
       </p:sp>
       <p:sp>
         <p:nvSpPr>
@@ -15130,6 +16101,13 @@
             <a:prstDash val="solid"/>
           </a:ln>
         </p:spPr>
+        <p:txBody>
+          <a:bodyPr/>
+          <a:lstStyle/>
+          <a:p>
+            <a:endParaRPr lang="en-US"/>
+          </a:p>
+        </p:txBody>
       </p:sp>
       <p:sp>
         <p:nvSpPr>
@@ -15191,6 +16169,13 @@
             <a:prstDash val="solid"/>
           </a:ln>
         </p:spPr>
+        <p:txBody>
+          <a:bodyPr/>
+          <a:lstStyle/>
+          <a:p>
+            <a:endParaRPr lang="en-US"/>
+          </a:p>
+        </p:txBody>
       </p:sp>
       <p:sp>
         <p:nvSpPr>
@@ -15252,6 +16237,13 @@
             <a:prstDash val="solid"/>
           </a:ln>
         </p:spPr>
+        <p:txBody>
+          <a:bodyPr/>
+          <a:lstStyle/>
+          <a:p>
+            <a:endParaRPr lang="en-US"/>
+          </a:p>
+        </p:txBody>
       </p:sp>
       <p:sp>
         <p:nvSpPr>
@@ -15313,6 +16305,13 @@
             <a:prstDash val="solid"/>
           </a:ln>
         </p:spPr>
+        <p:txBody>
+          <a:bodyPr/>
+          <a:lstStyle/>
+          <a:p>
+            <a:endParaRPr lang="en-US"/>
+          </a:p>
+        </p:txBody>
       </p:sp>
       <p:sp>
         <p:nvSpPr>
@@ -15388,6 +16387,13 @@
             <a:prstDash val="solid"/>
           </a:ln>
         </p:spPr>
+        <p:txBody>
+          <a:bodyPr/>
+          <a:lstStyle/>
+          <a:p>
+            <a:endParaRPr lang="en-US"/>
+          </a:p>
+        </p:txBody>
       </p:sp>
       <p:sp>
         <p:nvSpPr>
@@ -15463,6 +16469,13 @@
             <a:prstDash val="solid"/>
           </a:ln>
         </p:spPr>
+        <p:txBody>
+          <a:bodyPr/>
+          <a:lstStyle/>
+          <a:p>
+            <a:endParaRPr lang="en-US"/>
+          </a:p>
+        </p:txBody>
       </p:sp>
       <p:sp>
         <p:nvSpPr>
@@ -15524,6 +16537,13 @@
             <a:prstDash val="solid"/>
           </a:ln>
         </p:spPr>
+        <p:txBody>
+          <a:bodyPr/>
+          <a:lstStyle/>
+          <a:p>
+            <a:endParaRPr lang="en-US"/>
+          </a:p>
+        </p:txBody>
       </p:sp>
       <p:sp>
         <p:nvSpPr>
@@ -15585,6 +16605,13 @@
             <a:prstDash val="solid"/>
           </a:ln>
         </p:spPr>
+        <p:txBody>
+          <a:bodyPr/>
+          <a:lstStyle/>
+          <a:p>
+            <a:endParaRPr lang="en-US"/>
+          </a:p>
+        </p:txBody>
       </p:sp>
       <p:sp>
         <p:nvSpPr>
@@ -15646,6 +16673,13 @@
             <a:prstDash val="solid"/>
           </a:ln>
         </p:spPr>
+        <p:txBody>
+          <a:bodyPr/>
+          <a:lstStyle/>
+          <a:p>
+            <a:endParaRPr lang="en-US"/>
+          </a:p>
+        </p:txBody>
       </p:sp>
       <p:sp>
         <p:nvSpPr>
@@ -15721,6 +16755,13 @@
             <a:prstDash val="solid"/>
           </a:ln>
         </p:spPr>
+        <p:txBody>
+          <a:bodyPr/>
+          <a:lstStyle/>
+          <a:p>
+            <a:endParaRPr lang="en-US"/>
+          </a:p>
+        </p:txBody>
       </p:sp>
       <p:sp>
         <p:nvSpPr>
@@ -15796,6 +16837,13 @@
             <a:prstDash val="solid"/>
           </a:ln>
         </p:spPr>
+        <p:txBody>
+          <a:bodyPr/>
+          <a:lstStyle/>
+          <a:p>
+            <a:endParaRPr lang="en-US"/>
+          </a:p>
+        </p:txBody>
       </p:sp>
       <p:sp>
         <p:nvSpPr>
@@ -15857,6 +16905,13 @@
             <a:prstDash val="solid"/>
           </a:ln>
         </p:spPr>
+        <p:txBody>
+          <a:bodyPr/>
+          <a:lstStyle/>
+          <a:p>
+            <a:endParaRPr lang="en-US"/>
+          </a:p>
+        </p:txBody>
       </p:sp>
       <p:sp>
         <p:nvSpPr>
@@ -15918,6 +16973,13 @@
             <a:prstDash val="solid"/>
           </a:ln>
         </p:spPr>
+        <p:txBody>
+          <a:bodyPr/>
+          <a:lstStyle/>
+          <a:p>
+            <a:endParaRPr lang="en-US"/>
+          </a:p>
+        </p:txBody>
       </p:sp>
       <p:sp>
         <p:nvSpPr>
@@ -15979,6 +17041,13 @@
             <a:prstDash val="solid"/>
           </a:ln>
         </p:spPr>
+        <p:txBody>
+          <a:bodyPr/>
+          <a:lstStyle/>
+          <a:p>
+            <a:endParaRPr lang="en-US"/>
+          </a:p>
+        </p:txBody>
       </p:sp>
       <p:sp>
         <p:nvSpPr>
@@ -16054,6 +17123,13 @@
             <a:prstDash val="solid"/>
           </a:ln>
         </p:spPr>
+        <p:txBody>
+          <a:bodyPr/>
+          <a:lstStyle/>
+          <a:p>
+            <a:endParaRPr lang="en-US"/>
+          </a:p>
+        </p:txBody>
       </p:sp>
       <p:sp>
         <p:nvSpPr>
@@ -16115,6 +17191,13 @@
             <a:prstDash val="solid"/>
           </a:ln>
         </p:spPr>
+        <p:txBody>
+          <a:bodyPr/>
+          <a:lstStyle/>
+          <a:p>
+            <a:endParaRPr lang="en-US"/>
+          </a:p>
+        </p:txBody>
       </p:sp>
       <p:sp>
         <p:nvSpPr>
@@ -16176,6 +17259,13 @@
             <a:prstDash val="solid"/>
           </a:ln>
         </p:spPr>
+        <p:txBody>
+          <a:bodyPr/>
+          <a:lstStyle/>
+          <a:p>
+            <a:endParaRPr lang="en-US"/>
+          </a:p>
+        </p:txBody>
       </p:sp>
       <p:sp>
         <p:nvSpPr>
@@ -16273,6 +17363,13 @@
             <a:prstDash val="solid"/>
           </a:ln>
         </p:spPr>
+        <p:txBody>
+          <a:bodyPr/>
+          <a:lstStyle/>
+          <a:p>
+            <a:endParaRPr lang="en-US"/>
+          </a:p>
+        </p:txBody>
       </p:sp>
       <p:sp>
         <p:nvSpPr>
@@ -16370,6 +17467,13 @@
             <a:prstDash val="solid"/>
           </a:ln>
         </p:spPr>
+        <p:txBody>
+          <a:bodyPr/>
+          <a:lstStyle/>
+          <a:p>
+            <a:endParaRPr lang="en-US"/>
+          </a:p>
+        </p:txBody>
       </p:sp>
       <p:sp>
         <p:nvSpPr>
@@ -16467,6 +17571,13 @@
             <a:prstDash val="solid"/>
           </a:ln>
         </p:spPr>
+        <p:txBody>
+          <a:bodyPr/>
+          <a:lstStyle/>
+          <a:p>
+            <a:endParaRPr lang="en-US"/>
+          </a:p>
+        </p:txBody>
       </p:sp>
       <p:sp>
         <p:nvSpPr>
@@ -16564,6 +17675,13 @@
             <a:prstDash val="solid"/>
           </a:ln>
         </p:spPr>
+        <p:txBody>
+          <a:bodyPr/>
+          <a:lstStyle/>
+          <a:p>
+            <a:endParaRPr lang="en-US"/>
+          </a:p>
+        </p:txBody>
       </p:sp>
       <p:sp>
         <p:nvSpPr>
@@ -16694,6 +17812,13 @@
             <a:prstDash val="solid"/>
           </a:ln>
         </p:spPr>
+        <p:txBody>
+          <a:bodyPr/>
+          <a:lstStyle/>
+          <a:p>
+            <a:endParaRPr lang="en-US"/>
+          </a:p>
+        </p:txBody>
       </p:sp>
       <p:sp>
         <p:nvSpPr>
@@ -16837,6 +17962,13 @@
             </a:outerShdw>
           </a:effectLst>
         </p:spPr>
+        <p:txBody>
+          <a:bodyPr/>
+          <a:lstStyle/>
+          <a:p>
+            <a:endParaRPr lang="en-US"/>
+          </a:p>
+        </p:txBody>
       </p:sp>
       <p:sp>
         <p:nvSpPr>
@@ -16930,6 +18062,13 @@
             <a:prstDash val="solid"/>
           </a:ln>
         </p:spPr>
+        <p:txBody>
+          <a:bodyPr/>
+          <a:lstStyle/>
+          <a:p>
+            <a:endParaRPr lang="en-US"/>
+          </a:p>
+        </p:txBody>
       </p:sp>
       <p:sp>
         <p:nvSpPr>
@@ -16991,6 +18130,13 @@
             <a:prstDash val="solid"/>
           </a:ln>
         </p:spPr>
+        <p:txBody>
+          <a:bodyPr/>
+          <a:lstStyle/>
+          <a:p>
+            <a:endParaRPr lang="en-US"/>
+          </a:p>
+        </p:txBody>
       </p:sp>
       <p:sp>
         <p:nvSpPr>
@@ -17072,6 +18218,13 @@
             <a:prstDash val="solid"/>
           </a:ln>
         </p:spPr>
+        <p:txBody>
+          <a:bodyPr/>
+          <a:lstStyle/>
+          <a:p>
+            <a:endParaRPr lang="en-US"/>
+          </a:p>
+        </p:txBody>
       </p:sp>
       <p:sp>
         <p:nvSpPr>
@@ -17133,6 +18286,13 @@
             <a:prstDash val="solid"/>
           </a:ln>
         </p:spPr>
+        <p:txBody>
+          <a:bodyPr/>
+          <a:lstStyle/>
+          <a:p>
+            <a:endParaRPr lang="en-US"/>
+          </a:p>
+        </p:txBody>
       </p:sp>
       <p:sp>
         <p:nvSpPr>
@@ -17214,6 +18374,13 @@
             <a:prstDash val="solid"/>
           </a:ln>
         </p:spPr>
+        <p:txBody>
+          <a:bodyPr/>
+          <a:lstStyle/>
+          <a:p>
+            <a:endParaRPr lang="en-US"/>
+          </a:p>
+        </p:txBody>
       </p:sp>
       <p:sp>
         <p:nvSpPr>
@@ -17275,6 +18442,13 @@
             <a:prstDash val="solid"/>
           </a:ln>
         </p:spPr>
+        <p:txBody>
+          <a:bodyPr/>
+          <a:lstStyle/>
+          <a:p>
+            <a:endParaRPr lang="en-US"/>
+          </a:p>
+        </p:txBody>
       </p:sp>
       <p:sp>
         <p:nvSpPr>
@@ -17356,6 +18530,13 @@
             <a:prstDash val="solid"/>
           </a:ln>
         </p:spPr>
+        <p:txBody>
+          <a:bodyPr/>
+          <a:lstStyle/>
+          <a:p>
+            <a:endParaRPr lang="en-US"/>
+          </a:p>
+        </p:txBody>
       </p:sp>
       <p:sp>
         <p:nvSpPr>
@@ -17417,6 +18598,13 @@
             <a:prstDash val="solid"/>
           </a:ln>
         </p:spPr>
+        <p:txBody>
+          <a:bodyPr/>
+          <a:lstStyle/>
+          <a:p>
+            <a:endParaRPr lang="en-US"/>
+          </a:p>
+        </p:txBody>
       </p:sp>
       <p:sp>
         <p:nvSpPr>
@@ -17505,6 +18693,13 @@
             </a:outerShdw>
           </a:effectLst>
         </p:spPr>
+        <p:txBody>
+          <a:bodyPr/>
+          <a:lstStyle/>
+          <a:p>
+            <a:endParaRPr lang="en-US"/>
+          </a:p>
+        </p:txBody>
       </p:sp>
       <p:sp>
         <p:nvSpPr>
@@ -17530,6 +18725,13 @@
             <a:prstDash val="solid"/>
           </a:ln>
         </p:spPr>
+        <p:txBody>
+          <a:bodyPr/>
+          <a:lstStyle/>
+          <a:p>
+            <a:endParaRPr lang="en-US"/>
+          </a:p>
+        </p:txBody>
       </p:sp>
       <p:sp>
         <p:nvSpPr>
